--- a/dist/초1/진로·직업/작은목표/초1_진로·직업_작은목표_01_하루목표.pptx
+++ b/dist/초1/진로·직업/작은목표/초1_진로·직업_작은목표_01_하루목표.pptx
@@ -114,34 +114,34 @@
   <p:extLst>
     <p:ext uri="{521415D9-36F7-43E2-AB2F-B90AF26B5E84}">
       <p14:sectionLst xmlns:p14="http://schemas.microsoft.com/office/powerpoint/2010/main">
-        <p14:section name="도입" id="{708e4b96-df91-ec4e-e5cf-b13136caa99c}">
+        <p14:section name="도입" id="{b066bca6-0d86-a4c5-62c9-f741ee379c6f}">
           <p14:sldIdLst>
             <p14:sldId id="256"/>
             <p14:sldId id="257"/>
           </p14:sldIdLst>
         </p14:section>
-        <p14:section name="개념" id="{c6270abf-954a-afd8-cf74-75d41b9712e5}">
+        <p14:section name="개념" id="{35bd5c46-3786-b504-017f-2f4e2befbe03}">
           <p14:sldIdLst>
             <p14:sldId id="258"/>
           </p14:sldIdLst>
         </p14:section>
-        <p14:section name="연습" id="{09807d6f-5ab8-e717-5bbd-98c40cc1c73f}">
+        <p14:section name="연습" id="{1d9399b2-39f6-859c-04b7-19a3437158d2}">
           <p14:sldIdLst>
             <p14:sldId id="259"/>
             <p14:sldId id="260"/>
           </p14:sldIdLst>
         </p14:section>
-        <p14:section name="확인" id="{e81a5d1c-8a68-7a72-784e-127607328cff}">
+        <p14:section name="확인" id="{7b2ad141-7f0f-3414-cb48-56666437a539}">
           <p14:sldIdLst>
             <p14:sldId id="261"/>
           </p14:sldIdLst>
         </p14:section>
-        <p14:section name="정리" id="{ba482469-fa7a-6086-9b58-f9f80f3523ab}">
+        <p14:section name="정리" id="{d4d4ff45-887a-966a-083d-21457898ff9b}">
           <p14:sldIdLst>
             <p14:sldId id="262"/>
           </p14:sldIdLst>
         </p14:section>
-        <p14:section name="보충" id="{b719c257-b08d-fd8f-feda-51228d440603}">
+        <p14:section name="보충" id="{7bb4edb3-ed79-2cc8-54dc-41bfba777c82}">
           <p14:sldIdLst>
             <p14:sldId id="263"/>
           </p14:sldIdLst>

--- a/dist/초1/진로·직업/작은목표/초1_진로·직업_작은목표_01_하루목표.pptx
+++ b/dist/초1/진로·직업/작은목표/초1_진로·직업_작은목표_01_하루목표.pptx
@@ -114,34 +114,34 @@
   <p:extLst>
     <p:ext uri="{521415D9-36F7-43E2-AB2F-B90AF26B5E84}">
       <p14:sectionLst xmlns:p14="http://schemas.microsoft.com/office/powerpoint/2010/main">
-        <p14:section name="도입" id="{b066bca6-0d86-a4c5-62c9-f741ee379c6f}">
+        <p14:section name="도입" id="{2599668f-397e-e532-c00e-76a6b10ba08b}">
           <p14:sldIdLst>
             <p14:sldId id="256"/>
             <p14:sldId id="257"/>
           </p14:sldIdLst>
         </p14:section>
-        <p14:section name="개념" id="{35bd5c46-3786-b504-017f-2f4e2befbe03}">
+        <p14:section name="개념" id="{1832fda2-4d6e-dcb3-b0b5-5902a5a50210}">
           <p14:sldIdLst>
             <p14:sldId id="258"/>
           </p14:sldIdLst>
         </p14:section>
-        <p14:section name="연습" id="{1d9399b2-39f6-859c-04b7-19a3437158d2}">
+        <p14:section name="연습" id="{d98d8ae1-331d-96f3-effc-37215952f2c5}">
           <p14:sldIdLst>
             <p14:sldId id="259"/>
             <p14:sldId id="260"/>
           </p14:sldIdLst>
         </p14:section>
-        <p14:section name="확인" id="{7b2ad141-7f0f-3414-cb48-56666437a539}">
+        <p14:section name="확인" id="{3969757d-97c4-6f6a-f09d-1bf5f6a8902c}">
           <p14:sldIdLst>
             <p14:sldId id="261"/>
           </p14:sldIdLst>
         </p14:section>
-        <p14:section name="정리" id="{d4d4ff45-887a-966a-083d-21457898ff9b}">
+        <p14:section name="정리" id="{976bdfab-b89c-f08c-3247-c096a82de0fe}">
           <p14:sldIdLst>
             <p14:sldId id="262"/>
           </p14:sldIdLst>
         </p14:section>
-        <p14:section name="보충" id="{7bb4edb3-ed79-2cc8-54dc-41bfba777c82}">
+        <p14:section name="보충" id="{bb6bf309-cd64-c12f-3203-4bf7698997b8}">
           <p14:sldIdLst>
             <p14:sldId id="263"/>
           </p14:sldIdLst>
